--- a/dist/초2/음악·미술/리듬과가락/초2_음악·미술_리듬과가락_01_리듬과가락표현.pptx
+++ b/dist/초2/음악·미술/리듬과가락/초2_음악·미술_리듬과가락_01_리듬과가락표현.pptx
@@ -114,34 +114,34 @@
   <p:extLst>
     <p:ext uri="{521415D9-36F7-43E2-AB2F-B90AF26B5E84}">
       <p14:sectionLst xmlns:p14="http://schemas.microsoft.com/office/powerpoint/2010/main">
-        <p14:section name="도입" id="{53858049-c8cd-86e5-e192-53f97b9d6902}">
+        <p14:section name="도입" id="{d132bb73-eac0-4139-fefb-74591f54d4d2}">
           <p14:sldIdLst>
             <p14:sldId id="256"/>
             <p14:sldId id="257"/>
           </p14:sldIdLst>
         </p14:section>
-        <p14:section name="개념" id="{3f2b81aa-95f2-1a13-f405-88c661425b27}">
+        <p14:section name="개념" id="{d689b664-8a82-15f3-fef8-03c124bae455}">
           <p14:sldIdLst>
             <p14:sldId id="258"/>
           </p14:sldIdLst>
         </p14:section>
-        <p14:section name="연습" id="{c87cc225-c708-682f-d480-8bc4ce3dc3d3}">
+        <p14:section name="연습" id="{171c940c-c0d4-9a28-c53b-66cf82fcf0ca}">
           <p14:sldIdLst>
             <p14:sldId id="259"/>
             <p14:sldId id="260"/>
           </p14:sldIdLst>
         </p14:section>
-        <p14:section name="확인" id="{93f6ff1d-95a6-c233-3c2c-1819ecd94d85}">
+        <p14:section name="확인" id="{52024191-d984-d7d1-5333-a40aad936f1d}">
           <p14:sldIdLst>
             <p14:sldId id="261"/>
           </p14:sldIdLst>
         </p14:section>
-        <p14:section name="정리" id="{a19ff4bb-1d7c-8293-070c-e43c55505338}">
+        <p14:section name="정리" id="{bd679071-8c97-82e3-9c96-d0c7322a3e7d}">
           <p14:sldIdLst>
             <p14:sldId id="262"/>
           </p14:sldIdLst>
         </p14:section>
-        <p14:section name="보충" id="{79b65f57-c9c7-3839-76e0-8b00adaba42f}">
+        <p14:section name="보충" id="{4664386f-c887-a8b3-5e92-396f1d080ab5}">
           <p14:sldIdLst>
             <p14:sldId id="263"/>
           </p14:sldIdLst>
@@ -659,7 +659,7 @@
 - ② 앞의 두 번은 크게, 뒤의 두 번은 작게 칩니다.
 막히면
 - ①에서 점점 빨라지거나 들쭉날쭉하면 S08(보충)을 먼저 합니다.
-- 이 차시는 계획상 앞 차시가 없습니다. 초1 ‘박에 맞춰 노래하기’와 이어지는 내용입니다.</a:t>
+- 초1 ‘박에 맞춰 노래하기’와 이어지는 내용입니다.</a:t>
             </a:r>
             <a:endParaRPr lang="en-US" dirty="0"/>
           </a:p>
@@ -1272,7 +1272,7 @@
 막히면
 - 부모가 아이의 손을 잡고 함께 걷거나, 아이 무릎을 가볍게 같이 쳐 줍니다.
 주의
-- 이 차시는 계획상 앞 차시가 없습니다. 보충으로도 박이 고르지 않으면 초1 ‘박에 맞춰 노래하기’를 먼저 합니다.
+- 보충으로도 박이 고르지 않으면 초1 ‘박에 맞춰 노래하기’를 먼저 합니다.
 - 아래층을 생각해 발소리는 살살 냅니다.</a:t>
             </a:r>
             <a:endParaRPr lang="en-US" dirty="0"/>
